--- a/ECcourse/Evolutionary_Computation.pptx
+++ b/ECcourse/Evolutionary_Computation.pptx
@@ -3758,18 +3758,6 @@
               <a:rPr lang="en-US" altLang="zh-CN" sz="1900" b="1" dirty="0"/>
               <a:t>University of Georgia</a:t>
             </a:r>
-          </a:p>
-          <a:p>
-            <a:pPr marR="0" eaLnBrk="1" hangingPunct="1">
-              <a:lnSpc>
-                <a:spcPct val="80000"/>
-              </a:lnSpc>
-            </a:pPr>
-            <a:r>
-              <a:rPr lang="en-US" altLang="zh-CN" sz="1900" b="1" dirty="0"/>
-              <a:t>http://www.cs.uga.edu/~khaled</a:t>
-            </a:r>
-            <a:endParaRPr lang="zh-CN" altLang="en-US" sz="1900" dirty="0"/>
           </a:p>
         </p:txBody>
       </p:sp>
